--- a/builder/assets/reference-pages/spiral-maturity.pptx
+++ b/builder/assets/reference-pages/spiral-maturity.pptx
@@ -1097,7 +1097,7 @@
                   <a:srgbClr val="15375F"/>
                 </a:solidFill>
               </a:rPr>
-              <a:t>能力通过四圈迭代升级，每一圈都跑完设计、执行、度量、沉淀</a:t>
+              <a:t>Capabilities are upgraded through four rounds of iteration, with each round completing design, execution, measurement, and precipitation.</a:t>
             </a:r>
           </a:p>
         </p:txBody>
@@ -6803,7 +6803,7 @@
                   <a:srgbClr val="FFFFFF"/>
                 </a:solidFill>
               </a:rPr>
-              <a:t>不变内核｜业务价值可验证</a:t>
+              <a:t>immutable kernel｜Verifiable business value</a:t>
             </a:r>
           </a:p>
         </p:txBody>
@@ -7073,7 +7073,7 @@
                   <a:srgbClr val="172033"/>
                 </a:solidFill>
               </a:rPr>
-              <a:t>L1 试点｜0–3 个月｜单场景验证</a:t>
+              <a:t>L1 pilot｜0–3 months｜Single scene verification</a:t>
             </a:r>
           </a:p>
           <a:p xmlns:a="http://schemas.openxmlformats.org/drawingml/2006/main">
@@ -7090,7 +7090,7 @@
                   <a:srgbClr val="172033"/>
                 </a:solidFill>
               </a:rPr>
-              <a:t>证据 首个可用案例｜退出 ROI 达到 1.2</a:t>
+              <a:t>evidence First available case｜Exit ROI reach 1.2</a:t>
             </a:r>
           </a:p>
         </p:txBody>
@@ -7144,7 +7144,7 @@
                   <a:srgbClr val="15375F"/>
                 </a:solidFill>
               </a:rPr>
-              <a:t>1 设计｜定义试点</a:t>
+              <a:t>1 design｜Define pilot</a:t>
             </a:r>
           </a:p>
         </p:txBody>
@@ -7198,7 +7198,7 @@
                   <a:srgbClr val="15375F"/>
                 </a:solidFill>
               </a:rPr>
-              <a:t>2 执行｜跑通首例</a:t>
+              <a:t>2 execute｜The first case of run-through</a:t>
             </a:r>
           </a:p>
         </p:txBody>
@@ -7252,7 +7252,7 @@
                   <a:srgbClr val="15375F"/>
                 </a:solidFill>
               </a:rPr>
-              <a:t>3 度量｜测算 ROI</a:t>
+              <a:t>3 measure｜Calculate ROI</a:t>
             </a:r>
           </a:p>
         </p:txBody>
@@ -7306,7 +7306,7 @@
                   <a:srgbClr val="15375F"/>
                 </a:solidFill>
               </a:rPr>
-              <a:t>4 沉淀｜记录经验</a:t>
+              <a:t>4 precipitation｜record experience</a:t>
             </a:r>
           </a:p>
         </p:txBody>
@@ -7630,7 +7630,7 @@
                   <a:srgbClr val="172033"/>
                 </a:solidFill>
               </a:rPr>
-              <a:t>L2 复制｜4–6 个月｜跨团队复用</a:t>
+              <a:t>L2 Copy｜4–6 months｜Reuse across teams</a:t>
             </a:r>
           </a:p>
           <a:p xmlns:a="http://schemas.openxmlformats.org/drawingml/2006/main">
@@ -7647,7 +7647,7 @@
                   <a:srgbClr val="172033"/>
                 </a:solidFill>
               </a:rPr>
-              <a:t>证据 三个团队采用｜退出 复用率达到 60%</a:t>
+              <a:t>evidence Three teams adopted｜Exit The reuse rate reaches 60%</a:t>
             </a:r>
           </a:p>
         </p:txBody>
@@ -7701,7 +7701,7 @@
                   <a:srgbClr val="15375F"/>
                 </a:solidFill>
               </a:rPr>
-              <a:t>1 设计｜复制标准</a:t>
+              <a:t>1 design｜copy standard</a:t>
             </a:r>
           </a:p>
         </p:txBody>
@@ -7755,7 +7755,7 @@
                   <a:srgbClr val="15375F"/>
                 </a:solidFill>
               </a:rPr>
-              <a:t>2 执行｜部署团队</a:t>
+              <a:t>2 execute｜Deployment team</a:t>
             </a:r>
           </a:p>
         </p:txBody>
@@ -7809,7 +7809,7 @@
                   <a:srgbClr val="15375F"/>
                 </a:solidFill>
               </a:rPr>
-              <a:t>3 度量｜比较成效</a:t>
+              <a:t>3 measure｜Compare effectiveness</a:t>
             </a:r>
           </a:p>
         </p:txBody>
@@ -7863,7 +7863,7 @@
                   <a:srgbClr val="15375F"/>
                 </a:solidFill>
               </a:rPr>
-              <a:t>4 沉淀｜修订模板</a:t>
+              <a:t>4 precipitation｜revision template</a:t>
             </a:r>
           </a:p>
         </p:txBody>
@@ -8187,7 +8187,7 @@
                   <a:srgbClr val="172033"/>
                 </a:solidFill>
               </a:rPr>
-              <a:t>L3 标准化｜7–9 个月｜统一规则运行</a:t>
+              <a:t>L3 Standardization｜7–9 months｜Unified rule operation</a:t>
             </a:r>
           </a:p>
           <a:p xmlns:a="http://schemas.openxmlformats.org/drawingml/2006/main">
@@ -8204,7 +8204,7 @@
                   <a:srgbClr val="172033"/>
                 </a:solidFill>
               </a:rPr>
-              <a:t>证据 流程与指标固化｜退出 偏差率低于 10%</a:t>
+              <a:t>evidence Solidification of processes and indicators｜Exit The deviation rate is lower than 10%</a:t>
             </a:r>
           </a:p>
         </p:txBody>
@@ -8258,7 +8258,7 @@
                   <a:srgbClr val="15375F"/>
                 </a:solidFill>
               </a:rPr>
-              <a:t>1 设计｜固化流程</a:t>
+              <a:t>1 design｜Curing process</a:t>
             </a:r>
           </a:p>
         </p:txBody>
@@ -8312,7 +8312,7 @@
                   <a:srgbClr val="15375F"/>
                 </a:solidFill>
               </a:rPr>
-              <a:t>2 执行｜自动校验</a:t>
+              <a:t>2 execute｜Automatic verification</a:t>
             </a:r>
           </a:p>
         </p:txBody>
@@ -8366,7 +8366,7 @@
                   <a:srgbClr val="15375F"/>
                 </a:solidFill>
               </a:rPr>
-              <a:t>3 度量｜监控偏差</a:t>
+              <a:t>3 measure｜Monitor deviation</a:t>
             </a:r>
           </a:p>
         </p:txBody>
@@ -8420,7 +8420,7 @@
                   <a:srgbClr val="15375F"/>
                 </a:solidFill>
               </a:rPr>
-              <a:t>4 沉淀｜发布标准</a:t>
+              <a:t>4 precipitation｜Publishing standards</a:t>
             </a:r>
           </a:p>
         </p:txBody>
@@ -8744,7 +8744,7 @@
                   <a:srgbClr val="E8872D"/>
                 </a:solidFill>
               </a:rPr>
-              <a:t>L4 自我优化｜10–12 个月｜数据持续反哺</a:t>
+              <a:t>L4 self-optimization｜10–12 months｜Data continues to feed back</a:t>
             </a:r>
           </a:p>
           <a:p xmlns:a="http://schemas.openxmlformats.org/drawingml/2006/main">
@@ -8761,7 +8761,7 @@
                   <a:srgbClr val="E8872D"/>
                 </a:solidFill>
               </a:rPr>
-              <a:t>证据 季度自动迭代｜退出 效果连续两季提升</a:t>
+              <a:t>evidence Quarterly automatic iteration｜Exit Effect improved for two consecutive seasons</a:t>
             </a:r>
           </a:p>
         </p:txBody>
@@ -8815,7 +8815,7 @@
                   <a:srgbClr val="E8872D"/>
                 </a:solidFill>
               </a:rPr>
-              <a:t>1 设计｜优化规则</a:t>
+              <a:t>1 design｜Optimization rules</a:t>
             </a:r>
           </a:p>
         </p:txBody>
@@ -8869,7 +8869,7 @@
                   <a:srgbClr val="E8872D"/>
                 </a:solidFill>
               </a:rPr>
-              <a:t>2 执行｜自主运行</a:t>
+              <a:t>2 execute｜Run autonomously</a:t>
             </a:r>
           </a:p>
         </p:txBody>
@@ -8923,7 +8923,7 @@
                   <a:srgbClr val="E8872D"/>
                 </a:solidFill>
               </a:rPr>
-              <a:t>3 度量｜预测影响</a:t>
+              <a:t>3 measure｜Forecast impact</a:t>
             </a:r>
           </a:p>
         </p:txBody>
@@ -8977,7 +8977,7 @@
                   <a:srgbClr val="E8872D"/>
                 </a:solidFill>
               </a:rPr>
-              <a:t>4 沉淀｜数据回灌</a:t>
+              <a:t>4 precipitation｜data refeed</a:t>
             </a:r>
           </a:p>
         </p:txBody>
@@ -9029,7 +9029,7 @@
                   <a:srgbClr val="E8872D"/>
                 </a:solidFill>
               </a:rPr>
-              <a:t>经验回灌</a:t>
+              <a:t>Experience feedback</a:t>
             </a:r>
           </a:p>
         </p:txBody>
@@ -9079,7 +9079,7 @@
                   <a:srgbClr val="15375F"/>
                 </a:solidFill>
               </a:rPr>
-              <a:t>成熟度水位</a:t>
+              <a:t>maturity level</a:t>
             </a:r>
           </a:p>
         </p:txBody>
@@ -9133,7 +9133,7 @@
                   <a:srgbClr val="172033"/>
                 </a:solidFill>
               </a:rPr>
-              <a:t>L1 试点  ●</a:t>
+              <a:t>L1 pilot  ●</a:t>
             </a:r>
           </a:p>
         </p:txBody>
@@ -9187,7 +9187,7 @@
                   <a:srgbClr val="E8872D"/>
                 </a:solidFill>
               </a:rPr>
-              <a:t>L2 复制  ●</a:t>
+              <a:t>L2 Copy  ●</a:t>
             </a:r>
           </a:p>
         </p:txBody>
@@ -9241,7 +9241,7 @@
                   <a:srgbClr val="172033"/>
                 </a:solidFill>
               </a:rPr>
-              <a:t>L3 标准化  ○</a:t>
+              <a:t>L3 Standardization  ○</a:t>
             </a:r>
           </a:p>
         </p:txBody>
@@ -9295,7 +9295,7 @@
                   <a:srgbClr val="172033"/>
                 </a:solidFill>
               </a:rPr>
-              <a:t>L4 自我优化  ○</a:t>
+              <a:t>L4 self-optimization  ○</a:t>
             </a:r>
           </a:p>
         </p:txBody>
@@ -9351,7 +9351,7 @@
                   <a:srgbClr val="15375F"/>
                 </a:solidFill>
               </a:rPr>
-              <a:t>经验回灌，抬高下一轮起点</a:t>
+              <a:t>Feed back experience and raise the starting point for the next round</a:t>
             </a:r>
           </a:p>
         </p:txBody>
